--- a/docs/EXENSIORELOAD.pptx
+++ b/docs/EXENSIORELOAD.pptx
@@ -10,8 +10,8 @@
 <cp:coreProperties xmlns:cp="http://schemas.openxmlformats.org/package/2006/metadata/core-properties" xmlns:dc="http://purl.org/dc/elements/1.1/" xmlns:dcterms="http://purl.org/dc/terms/" xmlns:xsi="http://www.w3.org/2001/XMLSchema-instance">
   <dc:title>EXENSIORELOAD</dc:title>
   <dc:creator>ExensioReload</dc:creator>
-  <dcterms:created xsi:type="dcterms:W3CDTF">2026-05-22T02:54:15Z</dcterms:created>
-  <dcterms:modified xsi:type="dcterms:W3CDTF">2026-05-22T02:54:15Z</dcterms:modified>
+  <dcterms:created xsi:type="dcterms:W3CDTF">2026-05-25T01:31:19Z</dcterms:created>
+  <dcterms:modified xsi:type="dcterms:W3CDTF">2026-05-25T01:31:19Z</dcterms:modified>
 </cp:coreProperties>
 </file>
 
@@ -209,7 +209,7 @@
           <a:p>
             <a:r>
               <a:rPr lang="en-US" dirty="0"/>
-              <a:t>ExensioReload - Project Intelligence</a:t>
+              <a:t>ExensioReload Technical Overview</a:t>
             </a:r>
           </a:p>
         </p:txBody>
@@ -248,7 +248,7 @@
           <a:p>
             <a:r>
               <a:rPr lang="en-US" dirty="0"/>
-              <a:t>Modern glassmorphism UI - Angular 21 + Spring Boot 3 / Java 21</a:t>
+              <a:t>Modern glassmorphism UI built with Angular 21, Spring Boot 3, and Java 21.</a:t>
             </a:r>
           </a:p>
         </p:txBody>
@@ -323,34 +323,34 @@
             </a:pPr>
             <a:r>
               <a:rPr lang="en-US" dirty="0"/>
-              <a:t>Active: NEW to ENRICHMENT to EXENSIO_LOADING to DONE, FAILED, or CANCELLED.</a:t>
-            </a:r>
-          </a:p>
-          <a:p>
-            <a:pPr marL="342900" indent="-342900">
-              <a:buChar char="â€¢"/>
-            </a:pPr>
-            <a:r>
-              <a:rPr lang="en-US" dirty="0"/>
-              <a:t>SenderDispatchService: NEW to ENRICHMENT directly (ENQUEUED is dead code).</a:t>
-            </a:r>
-          </a:p>
-          <a:p>
-            <a:pPr marL="342900" indent="-342900">
-              <a:buChar char="â€¢"/>
-            </a:pPr>
-            <a:r>
-              <a:rPr lang="en-US" dirty="0"/>
-              <a:t>StagePipelinePolicy: after CP queue - ES to CpLogMonitor; else Exensio or DONE.</a:t>
-            </a:r>
-          </a:p>
-          <a:p>
-            <a:pPr marL="342900" indent="-342900">
-              <a:buChar char="â€¢"/>
-            </a:pPr>
-            <a:r>
-              <a:rPr lang="en-US" dirty="0"/>
-              <a:t>Capability-based completion; StatusMapper uses inExternalQueue for UI labels.</a:t>
+              <a:t>Active states flow from NEW to ENRICHMENT to EXENSIO_LOADING to DONE, FAILED, or CANCELLED.</a:t>
+            </a:r>
+          </a:p>
+          <a:p>
+            <a:pPr marL="342900" indent="-342900">
+              <a:buChar char="â€¢"/>
+            </a:pPr>
+            <a:r>
+              <a:rPr lang="en-US" dirty="0"/>
+              <a:t>SenderDispatchService sends NEW directly to ENRICHMENT; ENQUEUED is dead code.</a:t>
+            </a:r>
+          </a:p>
+          <a:p>
+            <a:pPr marL="342900" indent="-342900">
+              <a:buChar char="â€¢"/>
+            </a:pPr>
+            <a:r>
+              <a:rPr lang="en-US" dirty="0"/>
+              <a:t>StagePipelinePolicy routes after the CP queue: ES to CpLogMonitor, otherwise Exensio or DONE.</a:t>
+            </a:r>
+          </a:p>
+          <a:p>
+            <a:pPr marL="342900" indent="-342900">
+              <a:buChar char="â€¢"/>
+            </a:pPr>
+            <a:r>
+              <a:rPr lang="en-US" dirty="0"/>
+              <a:t>Completion is capability-based and StatusMapper uses inExternalQueue for UI labels.</a:t>
             </a:r>
           </a:p>
           <a:p>
@@ -434,43 +434,43 @@
             </a:pPr>
             <a:r>
               <a:rPr lang="en-US" dirty="0"/>
-              <a:t>100% standalone components, lazy routes, functional guards/interceptors.</a:t>
-            </a:r>
-          </a:p>
-          <a:p>
-            <a:pPr marL="342900" indent="-342900">
-              <a:buChar char="â€¢"/>
-            </a:pPr>
-            <a:r>
-              <a:rPr lang="en-US" dirty="0"/>
-              <a:t>Signals for UI state; RxJS for HTTP/SSE; glassmorphism design (not Material-themed).</a:t>
-            </a:r>
-          </a:p>
-          <a:p>
-            <a:pPr marL="342900" indent="-342900">
-              <a:buChar char="â€¢"/>
-            </a:pPr>
-            <a:r>
-              <a:rPr lang="en-US" dirty="0"/>
-              <a:t>Key routes: /exensioreload (dashboard), /exensioreload/new (stepper), /my-sessions, /admin/users.</a:t>
-            </a:r>
-          </a:p>
-          <a:p>
-            <a:pPr marL="342900" indent="-342900">
-              <a:buChar char="â€¢"/>
-            </a:pPr>
-            <a:r>
-              <a:rPr lang="en-US" dirty="0"/>
-              <a:t>GlassDialogService for dialogs; CVA form controls; dark + light themes.</a:t>
-            </a:r>
-          </a:p>
-          <a:p>
-            <a:pPr marL="342900" indent="-342900">
-              <a:buChar char="â€¢"/>
-            </a:pPr>
-            <a:r>
-              <a:rPr lang="en-US" dirty="0"/>
-              <a:t>Charts: ECharts in MySessionsComponent (trend + pie, ResizeObserver).</a:t>
+              <a:t>Frontend uses 100% standalone components, lazy routes, and functional guards/interceptors.</a:t>
+            </a:r>
+          </a:p>
+          <a:p>
+            <a:pPr marL="342900" indent="-342900">
+              <a:buChar char="â€¢"/>
+            </a:pPr>
+            <a:r>
+              <a:rPr lang="en-US" dirty="0"/>
+              <a:t>Signals manage UI state; RxJS powers HTTP and SSE; the design system is glassmorphism, not Material.</a:t>
+            </a:r>
+          </a:p>
+          <a:p>
+            <a:pPr marL="342900" indent="-342900">
+              <a:buChar char="â€¢"/>
+            </a:pPr>
+            <a:r>
+              <a:rPr lang="en-US" dirty="0"/>
+              <a:t>Key routes include /exensioreload, /exensioreload/new, /my-sessions, and /admin/users.</a:t>
+            </a:r>
+          </a:p>
+          <a:p>
+            <a:pPr marL="342900" indent="-342900">
+              <a:buChar char="â€¢"/>
+            </a:pPr>
+            <a:r>
+              <a:rPr lang="en-US" dirty="0"/>
+              <a:t>GlassDialogService handles dialogs, CVA form controls support form composition, and both dark and light themes are available.</a:t>
+            </a:r>
+          </a:p>
+          <a:p>
+            <a:pPr marL="342900" indent="-342900">
+              <a:buChar char="â€¢"/>
+            </a:pPr>
+            <a:r>
+              <a:rPr lang="en-US" dirty="0"/>
+              <a:t>ECharts in MySessionsComponent provides trend and pie visualizations with ResizeObserver support.</a:t>
             </a:r>
           </a:p>
         </p:txBody>
@@ -515,7 +515,7 @@
           <a:p>
             <a:r>
               <a:rPr lang="en-US" dirty="0"/>
-              <a:t>Core business flow - 3-step stepper</a:t>
+              <a:t>Core business flow</a:t>
             </a:r>
           </a:p>
         </p:txBody>
@@ -545,43 +545,43 @@
             </a:pPr>
             <a:r>
               <a:rPr lang="en-US" dirty="0"/>
-              <a:t>1. Configure: environment, site, sender; filters (lot, wafer, dates, tester, data type).</a:t>
-            </a:r>
-          </a:p>
-          <a:p>
-            <a:pPr marL="342900" indent="-342900">
-              <a:buChar char="â€¢"/>
-            </a:pPr>
-            <a:r>
-              <a:rPr lang="en-US" dirty="0"/>
-              <a:t>2. Preview: query external Oracle; duplicates vs SENDER_STAGE; stage selected or stage-all.</a:t>
-            </a:r>
-          </a:p>
-          <a:p>
-            <a:pPr marL="342900" indent="-342900">
-              <a:buChar char="â€¢"/>
-            </a:pPr>
-            <a:r>
-              <a:rPr lang="en-US" dirty="0"/>
-              <a:t>Adaptive sizing: 1000 rows normal; 10000 + bypassCap for historical/super-admin date range.</a:t>
-            </a:r>
-          </a:p>
-          <a:p>
-            <a:pPr marL="342900" indent="-342900">
-              <a:buChar char="â€¢"/>
-            </a:pPr>
-            <a:r>
-              <a:rPr lang="en-US" dirty="0"/>
-              <a:t>3. Monitor: SSE progress; dispatch to queues; email on session completion.</a:t>
-            </a:r>
-          </a:p>
-          <a:p>
-            <a:pPr marL="342900" indent="-342900">
-              <a:buChar char="â€¢"/>
-            </a:pPr>
-            <a:r>
-              <a:rPr lang="en-US" dirty="0"/>
-              <a:t>Dashboard: 10s polling snapshot; drill-down by site and sender.</a:t>
+              <a:t>1. Configure: environment, site, sender, and filters for lot, wafer, dates, tester, or data type.</a:t>
+            </a:r>
+          </a:p>
+          <a:p>
+            <a:pPr marL="342900" indent="-342900">
+              <a:buChar char="â€¢"/>
+            </a:pPr>
+            <a:r>
+              <a:rPr lang="en-US" dirty="0"/>
+              <a:t>2. Preview: query external Oracle, compare duplicates against SENDER_STAGE, and stage selected rows or stage-all.</a:t>
+            </a:r>
+          </a:p>
+          <a:p>
+            <a:pPr marL="342900" indent="-342900">
+              <a:buChar char="â€¢"/>
+            </a:pPr>
+            <a:r>
+              <a:rPr lang="en-US" dirty="0"/>
+              <a:t>Adaptive sizing uses 1000 rows normally and 10000 plus bypassCap for historical or super-admin date ranges.</a:t>
+            </a:r>
+          </a:p>
+          <a:p>
+            <a:pPr marL="342900" indent="-342900">
+              <a:buChar char="â€¢"/>
+            </a:pPr>
+            <a:r>
+              <a:rPr lang="en-US" dirty="0"/>
+              <a:t>3. Monitor: SSE progress, queue dispatch, and session-completion email.</a:t>
+            </a:r>
+          </a:p>
+          <a:p>
+            <a:pPr marL="342900" indent="-342900">
+              <a:buChar char="â€¢"/>
+            </a:pPr>
+            <a:r>
+              <a:rPr lang="en-US" dirty="0"/>
+              <a:t>Dashboard polling runs every 10s and enables drill-down by site and sender.</a:t>
             </a:r>
           </a:p>
         </p:txBody>
@@ -656,43 +656,43 @@
             </a:pPr>
             <a:r>
               <a:rPr lang="en-US" dirty="0"/>
-              <a:t>BackendService (598 LOC): all API calls; AuthService: JWT + refresh + SSO restore.</a:t>
-            </a:r>
-          </a:p>
-          <a:p>
-            <a:pPr marL="342900" indent="-342900">
-              <a:buChar char="â€¢"/>
-            </a:pPr>
-            <a:r>
-              <a:rPr lang="en-US" dirty="0"/>
-              <a:t>MonitoringService: EventSource SSE + polling fallback.</a:t>
-            </a:r>
-          </a:p>
-          <a:p>
-            <a:pPr marL="342900" indent="-342900">
-              <a:buChar char="â€¢"/>
-            </a:pPr>
-            <a:r>
-              <a:rPr lang="en-US" dirty="0"/>
-              <a:t>Immutable Java records for DTOs; thin controllers; @Scheduled + @Async.</a:t>
-            </a:r>
-          </a:p>
-          <a:p>
-            <a:pPr marL="342900" indent="-342900">
-              <a:buChar char="â€¢"/>
-            </a:pPr>
-            <a:r>
-              <a:rPr lang="en-US" dirty="0"/>
-              <a:t>Dynamic HikariCP pools per site; Caffeine preview cache (200 entries, 30s TTL).</a:t>
-            </a:r>
-          </a:p>
-          <a:p>
-            <a:pPr marL="342900" indent="-342900">
-              <a:buChar char="â€¢"/>
-            </a:pPr>
-            <a:r>
-              <a:rPr lang="en-US" dirty="0"/>
-              <a:t>Claim-based batch processing for concurrent-safe payload claiming.</a:t>
+              <a:t>BackendService centralizes API calls; AuthService handles JWT, refresh, and SSO restore.</a:t>
+            </a:r>
+          </a:p>
+          <a:p>
+            <a:pPr marL="342900" indent="-342900">
+              <a:buChar char="â€¢"/>
+            </a:pPr>
+            <a:r>
+              <a:rPr lang="en-US" dirty="0"/>
+              <a:t>MonitoringService combines EventSource SSE with polling fallback.</a:t>
+            </a:r>
+          </a:p>
+          <a:p>
+            <a:pPr marL="342900" indent="-342900">
+              <a:buChar char="â€¢"/>
+            </a:pPr>
+            <a:r>
+              <a:rPr lang="en-US" dirty="0"/>
+              <a:t>Immutable Java records back the DTOs, controllers stay thin, and scheduling uses @Scheduled plus @Async.</a:t>
+            </a:r>
+          </a:p>
+          <a:p>
+            <a:pPr marL="342900" indent="-342900">
+              <a:buChar char="â€¢"/>
+            </a:pPr>
+            <a:r>
+              <a:rPr lang="en-US" dirty="0"/>
+              <a:t>Dynamic HikariCP pools are created per site and preview caching uses Caffeine with 200 entries and 30s TTL.</a:t>
+            </a:r>
+          </a:p>
+          <a:p>
+            <a:pPr marL="342900" indent="-342900">
+              <a:buChar char="â€¢"/>
+            </a:pPr>
+            <a:r>
+              <a:rPr lang="en-US" dirty="0"/>
+              <a:t>Claim-based batch processing keeps payload claiming concurrency-safe.</a:t>
             </a:r>
           </a:p>
         </p:txBody>
@@ -767,43 +767,43 @@
             </a:pPr>
             <a:r>
               <a:rPr lang="en-US" dirty="0"/>
-              <a:t>Backend: records for DTOs, transactional services, audit IP/UserAgent, JSON error handlers.</a:t>
-            </a:r>
-          </a:p>
-          <a:p>
-            <a:pPr marL="342900" indent="-342900">
-              <a:buChar char="â€¢"/>
-            </a:pPr>
-            <a:r>
-              <a:rPr lang="en-US" dirty="0"/>
-              <a:t>Frontend: inject(), signal() for form state, glass-* component prefix, no NgModules.</a:t>
-            </a:r>
-          </a:p>
-          <a:p>
-            <a:pPr marL="342900" indent="-342900">
-              <a:buChar char="â€¢"/>
-            </a:pPr>
-            <a:r>
-              <a:rPr lang="en-US" dirty="0"/>
-              <a:t>Use frontend/, context /exensioreload/api, dev proxy :4200 to :8004.</a:t>
-            </a:r>
-          </a:p>
-          <a:p>
-            <a:pPr marL="342900" indent="-342900">
-              <a:buChar char="â€¢"/>
-            </a:pPr>
-            <a:r>
-              <a:rPr lang="en-US" dirty="0"/>
-              <a:t>Oracle SQL (ROWNUM, NVL); EXTERNAL_DB_ALLOW_WRITES for writes.</a:t>
-            </a:r>
-          </a:p>
-          <a:p>
-            <a:pPr marL="342900" indent="-342900">
-              <a:buChar char="â€¢"/>
-            </a:pPr>
-            <a:r>
-              <a:rPr lang="en-US" dirty="0"/>
-              <a:t>Standards: Signals-first UI state; preserve glass + dark/light themes.</a:t>
+              <a:t>Backend conventions favor records for DTOs, transactional services, audit IP/UserAgent capture, and JSON error handlers.</a:t>
+            </a:r>
+          </a:p>
+          <a:p>
+            <a:pPr marL="342900" indent="-342900">
+              <a:buChar char="â€¢"/>
+            </a:pPr>
+            <a:r>
+              <a:rPr lang="en-US" dirty="0"/>
+              <a:t>Frontend conventions favor inject(), signal() for form state, a glass-* component prefix, and no NgModules.</a:t>
+            </a:r>
+          </a:p>
+          <a:p>
+            <a:pPr marL="342900" indent="-342900">
+              <a:buChar char="â€¢"/>
+            </a:pPr>
+            <a:r>
+              <a:rPr lang="en-US" dirty="0"/>
+              <a:t>Use frontend/ with context /exensioreload/api and a dev proxy from :4200 to :8004.</a:t>
+            </a:r>
+          </a:p>
+          <a:p>
+            <a:pPr marL="342900" indent="-342900">
+              <a:buChar char="â€¢"/>
+            </a:pPr>
+            <a:r>
+              <a:rPr lang="en-US" dirty="0"/>
+              <a:t>Oracle SQL uses ROWNUM and NVL; EXTERNAL_DB_ALLOW_WRITES gates writes.</a:t>
+            </a:r>
+          </a:p>
+          <a:p>
+            <a:pPr marL="342900" indent="-342900">
+              <a:buChar char="â€¢"/>
+            </a:pPr>
+            <a:r>
+              <a:rPr lang="en-US" dirty="0"/>
+              <a:t>Standards remain Signals-first UI state with glass plus dark/light themes preserved.</a:t>
             </a:r>
           </a:p>
         </p:txBody>
@@ -878,52 +878,52 @@
             </a:pPr>
             <a:r>
               <a:rPr lang="en-US" dirty="0"/>
-              <a:t>StepperComponent ~2098 LOC; SenderController ~1644; RefDbService ~2334.</a:t>
-            </a:r>
-          </a:p>
-          <a:p>
-            <a:pPr marL="342900" indent="-342900">
-              <a:buChar char="â€¢"/>
-            </a:pPr>
-            <a:r>
-              <a:rPr lang="en-US" dirty="0"/>
-              <a:t>AuthGuard async: restoreSession via refresh cookie on new tab.</a:t>
-            </a:r>
-          </a:p>
-          <a:p>
-            <a:pPr marL="342900" indent="-342900">
-              <a:buChar char="â€¢"/>
-            </a:pPr>
-            <a:r>
-              <a:rPr lang="en-US" dirty="0"/>
-              <a:t>GlassDialogService vs Material Dialog - prefer Glass for new work.</a:t>
-            </a:r>
-          </a:p>
-          <a:p>
-            <a:pPr marL="342900" indent="-342900">
-              <a:buChar char="â€¢"/>
-            </a:pPr>
-            <a:r>
-              <a:rPr lang="en-US" dirty="0"/>
-              <a:t>CP ES + Exensio: safe to deploy unconfigured (no-op when URLs disabled).</a:t>
-            </a:r>
-          </a:p>
-          <a:p>
-            <a:pPr marL="342900" indent="-342900">
-              <a:buChar char="â€¢"/>
-            </a:pPr>
-            <a:r>
-              <a:rPr lang="en-US" dirty="0"/>
-              <a:t>No ES client library - raw HTTP via java.net.http.HttpClient.</a:t>
-            </a:r>
-          </a:p>
-          <a:p>
-            <a:pPr marL="342900" indent="-342900">
-              <a:buChar char="â€¢"/>
-            </a:pPr>
-            <a:r>
-              <a:rPr lang="en-US" dirty="0"/>
-              <a:t>Hub link: /exensio-integration-hub/ in app header.</a:t>
+              <a:t>StepperComponent is ~2098 LOC, SenderController ~1644, and RefDbService ~2334.</a:t>
+            </a:r>
+          </a:p>
+          <a:p>
+            <a:pPr marL="342900" indent="-342900">
+              <a:buChar char="â€¢"/>
+            </a:pPr>
+            <a:r>
+              <a:rPr lang="en-US" dirty="0"/>
+              <a:t>AuthGuard restores the session asynchronously via refresh cookie on a new tab.</a:t>
+            </a:r>
+          </a:p>
+          <a:p>
+            <a:pPr marL="342900" indent="-342900">
+              <a:buChar char="â€¢"/>
+            </a:pPr>
+            <a:r>
+              <a:rPr lang="en-US" dirty="0"/>
+              <a:t>Prefer GlassDialogService over Material Dialog for new work.</a:t>
+            </a:r>
+          </a:p>
+          <a:p>
+            <a:pPr marL="342900" indent="-342900">
+              <a:buChar char="â€¢"/>
+            </a:pPr>
+            <a:r>
+              <a:rPr lang="en-US" dirty="0"/>
+              <a:t>CP ES and Exensio integrations are safe to deploy unconfigured because they no-op when URLs are disabled.</a:t>
+            </a:r>
+          </a:p>
+          <a:p>
+            <a:pPr marL="342900" indent="-342900">
+              <a:buChar char="â€¢"/>
+            </a:pPr>
+            <a:r>
+              <a:rPr lang="en-US" dirty="0"/>
+              <a:t>There is no ES client library; raw HTTP uses java.net.http.HttpClient.</a:t>
+            </a:r>
+          </a:p>
+          <a:p>
+            <a:pPr marL="342900" indent="-342900">
+              <a:buChar char="â€¢"/>
+            </a:pPr>
+            <a:r>
+              <a:rPr lang="en-US" dirty="0"/>
+              <a:t>The app header exposes /exensio-integration-hub/.</a:t>
             </a:r>
           </a:p>
         </p:txBody>
@@ -995,31 +995,31 @@
           <a:p>
             <a:r>
               <a:rPr lang="en-US" dirty="0"/>
-              <a:t>docs/EXENSIORELOAD.md - this intelligence doc</a:t>
-            </a:r>
-          </a:p>
-          <a:p>
-            <a:r>
-              <a:rPr lang="en-US" dirty="0"/>
-              <a:t>docs/INTEGRATION_ES_EXENSIO.md - CP Elasticsearch and Exensio API</a:t>
-            </a:r>
-          </a:p>
-          <a:p>
-            <a:r>
-              <a:rPr lang="en-US" dirty="0"/>
-              <a:t>docs/ETL_SSH_TRIGGER.md - optional SSH ETL trigger</a:t>
-            </a:r>
-          </a:p>
-          <a:p>
-            <a:r>
-              <a:rPr lang="en-US" dirty="0"/>
-              <a:t>docs/SSO_ONBOARDING_DETAILS.md - Entra registration</a:t>
-            </a:r>
-          </a:p>
-          <a:p>
-            <a:r>
-              <a:rPr lang="en-US" dirty="0"/>
-              <a:t>docs/STATUS_PIPELINE.md, RXJS_VS_SIGNALS_GUIDE.md</a:t>
+              <a:t>docs/EXENSIORELOAD.md - project intelligence and architecture notes.</a:t>
+            </a:r>
+          </a:p>
+          <a:p>
+            <a:r>
+              <a:rPr lang="en-US" dirty="0"/>
+              <a:t>docs/INTEGRATION_ES_EXENSIO.md - CP Elasticsearch and Exensio API enablement.</a:t>
+            </a:r>
+          </a:p>
+          <a:p>
+            <a:r>
+              <a:rPr lang="en-US" dirty="0"/>
+              <a:t>docs/ETL_SSH_TRIGGER.md - optional SSH ETL trigger.</a:t>
+            </a:r>
+          </a:p>
+          <a:p>
+            <a:r>
+              <a:rPr lang="en-US" dirty="0"/>
+              <a:t>docs/SSO_ONBOARDING_DETAILS.md - Entra registration details.</a:t>
+            </a:r>
+          </a:p>
+          <a:p>
+            <a:r>
+              <a:rPr lang="en-US" dirty="0"/>
+              <a:t>docs/STATUS_PIPELINE.md and RXJS_VS_SIGNALS_GUIDE.md.</a:t>
             </a:r>
           </a:p>
         </p:txBody>
@@ -1094,34 +1094,34 @@
             </a:pPr>
             <a:r>
               <a:rPr lang="en-US" dirty="0"/>
-              <a:t>Frontend: Angular 21.2, port 4200 (dev) proxied to backend; Signals + RxJS; glass design system.</a:t>
-            </a:r>
-          </a:p>
-          <a:p>
-            <a:pPr marL="342900" indent="-342900">
-              <a:buChar char="â€¢"/>
-            </a:pPr>
-            <a:r>
-              <a:rPr lang="en-US" dirty="0"/>
-              <a:t>Backend: Spring Boot, port 8004, context /exensioreload; JWT + Entra OIDC; Liquibase; HikariCP per site.</a:t>
-            </a:r>
-          </a:p>
-          <a:p>
-            <a:pPr marL="342900" indent="-342900">
-              <a:buChar char="â€¢"/>
-            </a:pPr>
-            <a:r>
-              <a:rPr lang="en-US" dirty="0"/>
-              <a:t>Data: Oracle RefDB (staging) + 20+ site Oracle DBs; H2 for dev/test.</a:t>
-            </a:r>
-          </a:p>
-          <a:p>
-            <a:pPr marL="342900" indent="-342900">
-              <a:buChar char="â€¢"/>
-            </a:pPr>
-            <a:r>
-              <a:rPr lang="en-US" dirty="0"/>
-              <a:t>Active app: frontend/ only (no separate new_frontend workspace).</a:t>
+              <a:t>Frontend: Angular 21.2 on port 4200 in dev, proxied to backend; Signals + RxJS; glass design system.</a:t>
+            </a:r>
+          </a:p>
+          <a:p>
+            <a:pPr marL="342900" indent="-342900">
+              <a:buChar char="â€¢"/>
+            </a:pPr>
+            <a:r>
+              <a:rPr lang="en-US" dirty="0"/>
+              <a:t>Backend: Spring Boot on port 8004 with context /exensioreload; JWT + Entra OIDC; Liquibase; HikariCP per site.</a:t>
+            </a:r>
+          </a:p>
+          <a:p>
+            <a:pPr marL="342900" indent="-342900">
+              <a:buChar char="â€¢"/>
+            </a:pPr>
+            <a:r>
+              <a:rPr lang="en-US" dirty="0"/>
+              <a:t>Data: Oracle RefDB for staging plus 20+ site Oracle DBs; H2 for dev and test.</a:t>
+            </a:r>
+          </a:p>
+          <a:p>
+            <a:pPr marL="342900" indent="-342900">
+              <a:buChar char="â€¢"/>
+            </a:pPr>
+            <a:r>
+              <a:rPr lang="en-US" dirty="0"/>
+              <a:t>Active app location: frontend/ only; there is no separate new_frontend workspace.</a:t>
             </a:r>
           </a:p>
         </p:txBody>
@@ -1196,34 +1196,34 @@
             </a:pPr>
             <a:r>
               <a:rPr lang="en-US" dirty="0"/>
-              <a:t>Java 21, Spring Boot 4.0.6, Maven, JPA/Hibernate</a:t>
-            </a:r>
-          </a:p>
-          <a:p>
-            <a:pPr marL="342900" indent="-342900">
-              <a:buChar char="â€¢"/>
-            </a:pPr>
-            <a:r>
-              <a:rPr lang="en-US" dirty="0"/>
-              <a:t>Oracle ojdbc 23.3, H2 (test), Liquibase, HikariCP 5.0.1</a:t>
-            </a:r>
-          </a:p>
-          <a:p>
-            <a:pPr marL="342900" indent="-342900">
-              <a:buChar char="â€¢"/>
-            </a:pPr>
-            <a:r>
-              <a:rPr lang="en-US" dirty="0"/>
-              <a:t>JWT (jjwt) + Microsoft Entra OIDC, Caffeine cache, Micrometer/Prometheus</a:t>
-            </a:r>
-          </a:p>
-          <a:p>
-            <a:pPr marL="342900" indent="-342900">
-              <a:buChar char="â€¢"/>
-            </a:pPr>
-            <a:r>
-              <a:rPr lang="en-US" dirty="0"/>
-              <a:t>Package: com.onsemi.cim.apps.exensio.exensioreload (~148 Java source files)</a:t>
+              <a:t>Java 21, Spring Boot 4.0.6, Maven, and JPA/Hibernate.</a:t>
+            </a:r>
+          </a:p>
+          <a:p>
+            <a:pPr marL="342900" indent="-342900">
+              <a:buChar char="â€¢"/>
+            </a:pPr>
+            <a:r>
+              <a:rPr lang="en-US" dirty="0"/>
+              <a:t>Oracle ojdbc 23.3, H2 for tests, Liquibase, and HikariCP 5.0.1.</a:t>
+            </a:r>
+          </a:p>
+          <a:p>
+            <a:pPr marL="342900" indent="-342900">
+              <a:buChar char="â€¢"/>
+            </a:pPr>
+            <a:r>
+              <a:rPr lang="en-US" dirty="0"/>
+              <a:t>JWT (jjwt) plus Microsoft Entra OIDC, Caffeine cache, and Micrometer/Prometheus.</a:t>
+            </a:r>
+          </a:p>
+          <a:p>
+            <a:pPr marL="342900" indent="-342900">
+              <a:buChar char="â€¢"/>
+            </a:pPr>
+            <a:r>
+              <a:rPr lang="en-US" dirty="0"/>
+              <a:t>Package root: com.onsemi.cim.apps.exensio.exensioreload, with roughly 148 Java source files.</a:t>
             </a:r>
           </a:p>
         </p:txBody>
@@ -1298,52 +1298,52 @@
             </a:pPr>
             <a:r>
               <a:rPr lang="en-US" dirty="0"/>
-              <a:t>server.port=8004, context-path=/exensioreload</a:t>
-            </a:r>
-          </a:p>
-          <a:p>
-            <a:pPr marL="342900" indent="-342900">
-              <a:buChar char="â€¢"/>
-            </a:pPr>
-            <a:r>
-              <a:rPr lang="en-US" dirty="0"/>
-              <a:t>jwt.ttl=900s, refresh cookie max-age=604800 (7 days)</a:t>
-            </a:r>
-          </a:p>
-          <a:p>
-            <a:pPr marL="342900" indent="-342900">
-              <a:buChar char="â€¢"/>
-            </a:pPr>
-            <a:r>
-              <a:rPr lang="en-US" dirty="0"/>
-              <a:t>refdb.dispatch.interval-ms=60000</a:t>
-            </a:r>
-          </a:p>
-          <a:p>
-            <a:pPr marL="342900" indent="-342900">
-              <a:buChar char="â€¢"/>
-            </a:pPr>
-            <a:r>
-              <a:rPr lang="en-US" dirty="0"/>
-              <a:t>app.preview.fetch-cap / max-rows-cap: 2000 default; app.stage.max-rows-cap: 10000</a:t>
-            </a:r>
-          </a:p>
-          <a:p>
-            <a:pPr marL="342900" indent="-342900">
-              <a:buChar char="â€¢"/>
-            </a:pPr>
-            <a:r>
-              <a:rPr lang="en-US" dirty="0"/>
-              <a:t>external-db.allow-writes=false (gate for external DB writes)</a:t>
-            </a:r>
-          </a:p>
-          <a:p>
-            <a:pPr marL="342900" indent="-342900">
-              <a:buChar char="â€¢"/>
-            </a:pPr>
-            <a:r>
-              <a:rPr lang="en-US" dirty="0"/>
-              <a:t>dbconnections.yml: 20+ site Oracle connections (PROD/QA)</a:t>
+              <a:t>server.port=8004 and context-path=/exensioreload.</a:t>
+            </a:r>
+          </a:p>
+          <a:p>
+            <a:pPr marL="342900" indent="-342900">
+              <a:buChar char="â€¢"/>
+            </a:pPr>
+            <a:r>
+              <a:rPr lang="en-US" dirty="0"/>
+              <a:t>jwt.ttl=900s and refresh cookie max-age=604800 seconds (7 days).</a:t>
+            </a:r>
+          </a:p>
+          <a:p>
+            <a:pPr marL="342900" indent="-342900">
+              <a:buChar char="â€¢"/>
+            </a:pPr>
+            <a:r>
+              <a:rPr lang="en-US" dirty="0"/>
+              <a:t>refdb.dispatch.interval-ms=60000.</a:t>
+            </a:r>
+          </a:p>
+          <a:p>
+            <a:pPr marL="342900" indent="-342900">
+              <a:buChar char="â€¢"/>
+            </a:pPr>
+            <a:r>
+              <a:rPr lang="en-US" dirty="0"/>
+              <a:t>app.preview.fetch-cap and app.preview.max-rows-cap default to 2000; app.stage.max-rows-cap is 10000.</a:t>
+            </a:r>
+          </a:p>
+          <a:p>
+            <a:pPr marL="342900" indent="-342900">
+              <a:buChar char="â€¢"/>
+            </a:pPr>
+            <a:r>
+              <a:rPr lang="en-US" dirty="0"/>
+              <a:t>external-db.allow-writes=false to gate external database writes.</a:t>
+            </a:r>
+          </a:p>
+          <a:p>
+            <a:pPr marL="342900" indent="-342900">
+              <a:buChar char="â€¢"/>
+            </a:pPr>
+            <a:r>
+              <a:rPr lang="en-US" dirty="0"/>
+              <a:t>dbconnections.yml contains 20+ site Oracle connections for PROD and QA.</a:t>
             </a:r>
           </a:p>
         </p:txBody>
@@ -1418,34 +1418,34 @@
             </a:pPr>
             <a:r>
               <a:rPr lang="en-US" dirty="0"/>
-              <a:t>Auth (public): login, refresh, register, verify, password reset.</a:t>
-            </a:r>
-          </a:p>
-          <a:p>
-            <a:pPr marL="342900" indent="-342900">
-              <a:buChar char="â€¢"/>
-            </a:pPr>
-            <a:r>
-              <a:rPr lang="en-US" dirty="0"/>
-              <a:t>Senders: discover/preview, preview-with-duplicates, historical-summary, stage-all, stage, dispatch.</a:t>
-            </a:r>
-          </a:p>
-          <a:p>
-            <a:pPr marL="342900" indent="-342900">
-              <a:buChar char="â€¢"/>
-            </a:pPr>
-            <a:r>
-              <a:rPr lang="en-US" dirty="0"/>
-              <a:t>Lookups: senders, locations, dataTypes, testerTypes, external metadata filters.</a:t>
-            </a:r>
-          </a:p>
-          <a:p>
-            <a:pPr marL="342900" indent="-342900">
-              <a:buChar char="â€¢"/>
-            </a:pPr>
-            <a:r>
-              <a:rPr lang="en-US" dirty="0"/>
-              <a:t>Exports: preview CSV; duplicate checks before staging.</a:t>
+              <a:t>Auth endpoints cover login, refresh, registration, verification, and password reset.</a:t>
+            </a:r>
+          </a:p>
+          <a:p>
+            <a:pPr marL="342900" indent="-342900">
+              <a:buChar char="â€¢"/>
+            </a:pPr>
+            <a:r>
+              <a:rPr lang="en-US" dirty="0"/>
+              <a:t>Sender endpoints include discover/preview, preview-with-duplicates, historical-summary, stage-all, stage, and dispatch.</a:t>
+            </a:r>
+          </a:p>
+          <a:p>
+            <a:pPr marL="342900" indent="-342900">
+              <a:buChar char="â€¢"/>
+            </a:pPr>
+            <a:r>
+              <a:rPr lang="en-US" dirty="0"/>
+              <a:t>Lookup endpoints expose senders, locations, dataTypes, testerTypes, and external metadata filters.</a:t>
+            </a:r>
+          </a:p>
+          <a:p>
+            <a:pPr marL="342900" indent="-342900">
+              <a:buChar char="â€¢"/>
+            </a:pPr>
+            <a:r>
+              <a:rPr lang="en-US" dirty="0"/>
+              <a:t>Exports support preview CSV downloads and duplicate checks before staging.</a:t>
             </a:r>
           </a:p>
         </p:txBody>
@@ -1520,43 +1520,43 @@
             </a:pPr>
             <a:r>
               <a:rPr lang="en-US" dirty="0"/>
-              <a:t>Stage: records, stats, SSE monitor/{requestId}, CSV export, active-sessions.</a:t>
-            </a:r>
-          </a:p>
-          <a:p>
-            <a:pPr marL="342900" indent="-342900">
-              <a:buChar char="â€¢"/>
-            </a:pPr>
-            <a:r>
-              <a:rPr lang="en-US" dirty="0"/>
-              <a:t>Dashboard: snapshot, per-site/sender records and CSV export.</a:t>
-            </a:r>
-          </a:p>
-          <a:p>
-            <a:pPr marL="342900" indent="-342900">
-              <a:buChar char="â€¢"/>
-            </a:pPr>
-            <a:r>
-              <a:rPr lang="en-US" dirty="0"/>
-              <a:t>Admin users (SUPER_ADMIN): CRUD, roles, toggle status, audit-logs, stats.</a:t>
-            </a:r>
-          </a:p>
-          <a:p>
-            <a:pPr marL="342900" indent="-342900">
-              <a:buChar char="â€¢"/>
-            </a:pPr>
-            <a:r>
-              <a:rPr lang="en-US" dirty="0"/>
-              <a:t>Internal: pool stats/evict, metrics, session management.</a:t>
-            </a:r>
-          </a:p>
-          <a:p>
-            <a:pPr marL="342900" indent="-342900">
-              <a:buChar char="â€¢"/>
-            </a:pPr>
-            <a:r>
-              <a:rPr lang="en-US" dirty="0"/>
-              <a:t>Config: /api/config/limits for preview/stage thresholds.</a:t>
+              <a:t>Stage APIs provide records, stats, SSE monitor/{requestId}, CSV export, and active sessions.</a:t>
+            </a:r>
+          </a:p>
+          <a:p>
+            <a:pPr marL="342900" indent="-342900">
+              <a:buChar char="â€¢"/>
+            </a:pPr>
+            <a:r>
+              <a:rPr lang="en-US" dirty="0"/>
+              <a:t>Dashboard APIs provide snapshot metrics plus per-site and per-sender records with CSV export.</a:t>
+            </a:r>
+          </a:p>
+          <a:p>
+            <a:pPr marL="342900" indent="-342900">
+              <a:buChar char="â€¢"/>
+            </a:pPr>
+            <a:r>
+              <a:rPr lang="en-US" dirty="0"/>
+              <a:t>Admin APIs for SUPER_ADMIN support CRUD, role changes, status toggles, audit logs, and stats.</a:t>
+            </a:r>
+          </a:p>
+          <a:p>
+            <a:pPr marL="342900" indent="-342900">
+              <a:buChar char="â€¢"/>
+            </a:pPr>
+            <a:r>
+              <a:rPr lang="en-US" dirty="0"/>
+              <a:t>Internal APIs expose pool stats, evict, metrics, and session management.</a:t>
+            </a:r>
+          </a:p>
+          <a:p>
+            <a:pPr marL="342900" indent="-342900">
+              <a:buChar char="â€¢"/>
+            </a:pPr>
+            <a:r>
+              <a:rPr lang="en-US" dirty="0"/>
+              <a:t>Config APIs expose /api/config/limits for preview and stage thresholds.</a:t>
             </a:r>
           </a:p>
         </p:txBody>
@@ -1631,43 +1631,43 @@
             </a:pPr>
             <a:r>
               <a:rPr lang="en-US" dirty="0"/>
-              <a:t>SENDER_STAGE - core staging on RefDB (status, request_id, CP/Exensio keys).</a:t>
-            </a:r>
-          </a:p>
-          <a:p>
-            <a:pPr marL="342900" indent="-342900">
-              <a:buChar char="â€¢"/>
-            </a:pPr>
-            <a:r>
-              <a:rPr lang="en-US" dirty="0"/>
-              <a:t>sender_queue, load_session, load_session_payload - batch processing.</a:t>
-            </a:r>
-          </a:p>
-          <a:p>
-            <a:pPr marL="342900" indent="-342900">
-              <a:buChar char="â€¢"/>
-            </a:pPr>
-            <a:r>
-              <a:rPr lang="en-US" dirty="0"/>
-              <a:t>users, user_roles, refresh/verification/password tokens, audit_log.</a:t>
-            </a:r>
-          </a:p>
-          <a:p>
-            <a:pPr marL="342900" indent="-342900">
-              <a:buChar char="â€¢"/>
-            </a:pPr>
-            <a:r>
-              <a:rPr lang="en-US" dirty="0"/>
-              <a:t>external_environment, external_location - environment definitions.</a:t>
-            </a:r>
-          </a:p>
-          <a:p>
-            <a:pPr marL="342900" indent="-342900">
-              <a:buChar char="â€¢"/>
-            </a:pPr>
-            <a:r>
-              <a:rPr lang="en-US" dirty="0"/>
-              <a:t>15 changelogs; Oracle-specific SQL in JdbcExternalMetadataRepository.</a:t>
+              <a:t>SENDER_STAGE is the core staging table on RefDB and tracks status, request_id, and CP/Exensio keys.</a:t>
+            </a:r>
+          </a:p>
+          <a:p>
+            <a:pPr marL="342900" indent="-342900">
+              <a:buChar char="â€¢"/>
+            </a:pPr>
+            <a:r>
+              <a:rPr lang="en-US" dirty="0"/>
+              <a:t>sender_queue, load_session, and load_session_payload support batch processing.</a:t>
+            </a:r>
+          </a:p>
+          <a:p>
+            <a:pPr marL="342900" indent="-342900">
+              <a:buChar char="â€¢"/>
+            </a:pPr>
+            <a:r>
+              <a:rPr lang="en-US" dirty="0"/>
+              <a:t>users, user_roles, refresh tokens, verification tokens, password tokens, and audit_log support identity and audit.</a:t>
+            </a:r>
+          </a:p>
+          <a:p>
+            <a:pPr marL="342900" indent="-342900">
+              <a:buChar char="â€¢"/>
+            </a:pPr>
+            <a:r>
+              <a:rPr lang="en-US" dirty="0"/>
+              <a:t>external_environment and external_location define environments.</a:t>
+            </a:r>
+          </a:p>
+          <a:p>
+            <a:pPr marL="342900" indent="-342900">
+              <a:buChar char="â€¢"/>
+            </a:pPr>
+            <a:r>
+              <a:rPr lang="en-US" dirty="0"/>
+              <a:t>Liquibase manages 15 changelogs; JdbcExternalMetadataRepository contains Oracle-specific SQL.</a:t>
             </a:r>
           </a:p>
         </p:txBody>
@@ -1742,43 +1742,43 @@
             </a:pPr>
             <a:r>
               <a:rPr lang="en-US" dirty="0"/>
-              <a:t>Local JWT + refresh token in DB; HTTP-only refresh cookie survives browser restart.</a:t>
-            </a:r>
-          </a:p>
-          <a:p>
-            <a:pPr marL="342900" indent="-342900">
-              <a:buChar char="â€¢"/>
-            </a:pPr>
-            <a:r>
-              <a:rPr lang="en-US" dirty="0"/>
-              <a:t>Entra OIDC when reloader.sso.enabled=true; groups map to ADMIN and SUPER_ADMIN.</a:t>
-            </a:r>
-          </a:p>
-          <a:p>
-            <a:pPr marL="342900" indent="-342900">
-              <a:buChar char="â€¢"/>
-            </a:pPr>
-            <a:r>
-              <a:rPr lang="en-US" dirty="0"/>
-              <a:t>JwtAuthenticationFilter, stateless sessions, CSRF disabled.</a:t>
-            </a:r>
-          </a:p>
-          <a:p>
-            <a:pPr marL="342900" indent="-342900">
-              <a:buChar char="â€¢"/>
-            </a:pPr>
-            <a:r>
-              <a:rPr lang="en-US" dirty="0"/>
-              <a:t>Role hierarchy: SUPER_ADMIN, then ADMIN, then USER; PreAuthorize on controllers.</a:t>
-            </a:r>
-          </a:p>
-          <a:p>
-            <a:pPr marL="342900" indent="-342900">
-              <a:buChar char="â€¢"/>
-            </a:pPr>
-            <a:r>
-              <a:rPr lang="en-US" dirty="0"/>
-              <a:t>SSO: /api/auth/sso/initiate, /api/auth/sso/silent, callback /sso-callback.</a:t>
+              <a:t>Local JWT plus refresh token storage in DB; HTTP-only refresh cookie survives browser restart.</a:t>
+            </a:r>
+          </a:p>
+          <a:p>
+            <a:pPr marL="342900" indent="-342900">
+              <a:buChar char="â€¢"/>
+            </a:pPr>
+            <a:r>
+              <a:rPr lang="en-US" dirty="0"/>
+              <a:t>Entra OIDC activates when reloader.sso.enabled=true, with groups mapped to ADMIN and SUPER_ADMIN.</a:t>
+            </a:r>
+          </a:p>
+          <a:p>
+            <a:pPr marL="342900" indent="-342900">
+              <a:buChar char="â€¢"/>
+            </a:pPr>
+            <a:r>
+              <a:rPr lang="en-US" dirty="0"/>
+              <a:t>JwtAuthenticationFilter runs in a stateless session model with CSRF disabled.</a:t>
+            </a:r>
+          </a:p>
+          <a:p>
+            <a:pPr marL="342900" indent="-342900">
+              <a:buChar char="â€¢"/>
+            </a:pPr>
+            <a:r>
+              <a:rPr lang="en-US" dirty="0"/>
+              <a:t>Role hierarchy is SUPER_ADMIN, then ADMIN, then USER, enforced with PreAuthorize on controllers.</a:t>
+            </a:r>
+          </a:p>
+          <a:p>
+            <a:pPr marL="342900" indent="-342900">
+              <a:buChar char="â€¢"/>
+            </a:pPr>
+            <a:r>
+              <a:rPr lang="en-US" dirty="0"/>
+              <a:t>SSO routes include /api/auth/sso/initiate, /api/auth/sso/silent, and callback /sso-callback.</a:t>
             </a:r>
           </a:p>
         </p:txBody>
@@ -1853,52 +1853,52 @@
             </a:pPr>
             <a:r>
               <a:rPr lang="en-US" dirty="0"/>
-              <a:t>SenderDispatchService 60s: NEW to DTP_SENDER_QUEUE_ITEM to ENRICHMENT.</a:t>
-            </a:r>
-          </a:p>
-          <a:p>
-            <a:pPr marL="342900" indent="-342900">
-              <a:buChar char="â€¢"/>
-            </a:pPr>
-            <a:r>
-              <a:rPr lang="en-US" dirty="0"/>
-              <a:t>SenderQueueMonitor 10s: queue consumption; ES on/off routing.</a:t>
-            </a:r>
-          </a:p>
-          <a:p>
-            <a:pPr marL="342900" indent="-342900">
-              <a:buChar char="â€¢"/>
-            </a:pPr>
-            <a:r>
-              <a:rPr lang="en-US" dirty="0"/>
-              <a:t>CpLogMonitor 60s: ES polling when configured; ENRICHMENT to EXENSIO_LOADING or FAILED.</a:t>
-            </a:r>
-          </a:p>
-          <a:p>
-            <a:pPr marL="342900" indent="-342900">
-              <a:buChar char="â€¢"/>
-            </a:pPr>
-            <a:r>
-              <a:rPr lang="en-US" dirty="0"/>
-              <a:t>ExensioLoadMonitor 60s: API load confirm to DONE or FAILED.</a:t>
-            </a:r>
-          </a:p>
-          <a:p>
-            <a:pPr marL="342900" indent="-342900">
-              <a:buChar char="â€¢"/>
-            </a:pPr>
-            <a:r>
-              <a:rPr lang="en-US" dirty="0"/>
-              <a:t>CompletionNotificationService every 5 min: email when session complete.</a:t>
-            </a:r>
-          </a:p>
-          <a:p>
-            <a:pPr marL="342900" indent="-342900">
-              <a:buChar char="â€¢"/>
-            </a:pPr>
-            <a:r>
-              <a:rPr lang="en-US" dirty="0"/>
-              <a:t>EtlSshTriggerService: optional SSH crontab kick (etlservers.yml).</a:t>
+              <a:t>SenderDispatchService runs every 60s and moves NEW items into the sender queue and then ENRICHMENT.</a:t>
+            </a:r>
+          </a:p>
+          <a:p>
+            <a:pPr marL="342900" indent="-342900">
+              <a:buChar char="â€¢"/>
+            </a:pPr>
+            <a:r>
+              <a:rPr lang="en-US" dirty="0"/>
+              <a:t>SenderQueueMonitor runs every 10s for queue consumption and ES on/off routing.</a:t>
+            </a:r>
+          </a:p>
+          <a:p>
+            <a:pPr marL="342900" indent="-342900">
+              <a:buChar char="â€¢"/>
+            </a:pPr>
+            <a:r>
+              <a:rPr lang="en-US" dirty="0"/>
+              <a:t>CpLogMonitor runs every 60s for ES polling and routes ENRICHMENT to EXENSIO_LOADING or FAILED.</a:t>
+            </a:r>
+          </a:p>
+          <a:p>
+            <a:pPr marL="342900" indent="-342900">
+              <a:buChar char="â€¢"/>
+            </a:pPr>
+            <a:r>
+              <a:rPr lang="en-US" dirty="0"/>
+              <a:t>ExensioLoadMonitor runs every 60s and moves API load confirmation to DONE or FAILED.</a:t>
+            </a:r>
+          </a:p>
+          <a:p>
+            <a:pPr marL="342900" indent="-342900">
+              <a:buChar char="â€¢"/>
+            </a:pPr>
+            <a:r>
+              <a:rPr lang="en-US" dirty="0"/>
+              <a:t>CompletionNotificationService runs every 5 minutes and emails users when a session completes.</a:t>
+            </a:r>
+          </a:p>
+          <a:p>
+            <a:pPr marL="342900" indent="-342900">
+              <a:buChar char="â€¢"/>
+            </a:pPr>
+            <a:r>
+              <a:rPr lang="en-US" dirty="0"/>
+              <a:t>EtlSshTriggerService provides an optional SSH crontab kick via etlservers.yml.</a:t>
             </a:r>
           </a:p>
         </p:txBody>
